--- a/Reporte060426.pptx
+++ b/Reporte060426.pptx
@@ -5,7 +5,7 @@
     <p:sldMasterId id="2147483672" r:id="rId1"/>
   </p:sldMasterIdLst>
   <p:notesMasterIdLst>
-    <p:notesMasterId r:id="rId16"/>
+    <p:notesMasterId r:id="rId15"/>
   </p:notesMasterIdLst>
   <p:sldIdLst>
     <p:sldId id="350" r:id="rId2"/>
@@ -19,32 +19,31 @@
     <p:sldId id="361" r:id="rId10"/>
     <p:sldId id="371" r:id="rId11"/>
     <p:sldId id="370" r:id="rId12"/>
-    <p:sldId id="379" r:id="rId13"/>
-    <p:sldId id="380" r:id="rId14"/>
-    <p:sldId id="280" r:id="rId15"/>
+    <p:sldId id="380" r:id="rId13"/>
+    <p:sldId id="280" r:id="rId14"/>
   </p:sldIdLst>
   <p:sldSz cx="9144000" cy="5143500" type="screen16x9"/>
   <p:notesSz cx="6858000" cy="9144000"/>
   <p:embeddedFontLst>
     <p:embeddedFont>
       <p:font typeface="Montserrat" panose="00000500000000000000" pitchFamily="2" charset="0"/>
-      <p:regular r:id="rId17"/>
-      <p:bold r:id="rId18"/>
-      <p:italic r:id="rId19"/>
-      <p:boldItalic r:id="rId20"/>
+      <p:regular r:id="rId16"/>
+      <p:bold r:id="rId17"/>
+      <p:italic r:id="rId18"/>
+      <p:boldItalic r:id="rId19"/>
     </p:embeddedFont>
     <p:embeddedFont>
       <p:font typeface="Montserrat Black" panose="00000A00000000000000" pitchFamily="2" charset="0"/>
-      <p:bold r:id="rId21"/>
-      <p:italic r:id="rId22"/>
-      <p:boldItalic r:id="rId23"/>
+      <p:bold r:id="rId20"/>
+      <p:italic r:id="rId21"/>
+      <p:boldItalic r:id="rId22"/>
     </p:embeddedFont>
     <p:embeddedFont>
       <p:font typeface="Segoe UI" panose="020B0502040204020203" pitchFamily="34" charset="0"/>
-      <p:regular r:id="rId24"/>
-      <p:bold r:id="rId25"/>
-      <p:italic r:id="rId26"/>
-      <p:boldItalic r:id="rId27"/>
+      <p:regular r:id="rId23"/>
+      <p:bold r:id="rId24"/>
+      <p:italic r:id="rId25"/>
+      <p:boldItalic r:id="rId26"/>
     </p:embeddedFont>
   </p:embeddedFontLst>
   <p:defaultTextStyle>
@@ -6173,10 +6172,10 @@
       </p:sp>
       <p:pic>
         <p:nvPicPr>
-          <p:cNvPr id="3" name="Imagen 2">
+          <p:cNvPr id="4" name="Imagen 3">
             <a:extLst>
               <a:ext uri="{FF2B5EF4-FFF2-40B4-BE49-F238E27FC236}">
-                <a16:creationId xmlns:a16="http://schemas.microsoft.com/office/drawing/2014/main" id="{CD027F35-3A48-6256-BC58-7E83FD96E661}"/>
+                <a16:creationId xmlns:a16="http://schemas.microsoft.com/office/drawing/2014/main" id="{DEFC884C-751E-94CD-94DB-D571B68ECACC}"/>
               </a:ext>
             </a:extLst>
           </p:cNvPr>
@@ -6193,8 +6192,8 @@
         </p:blipFill>
         <p:spPr>
           <a:xfrm>
-            <a:off x="0" y="1230022"/>
-            <a:ext cx="9144000" cy="2683455"/>
+            <a:off x="0" y="1364579"/>
+            <a:ext cx="9144000" cy="2414341"/>
           </a:xfrm>
           <a:prstGeom prst="rect">
             <a:avLst/>
@@ -6271,10 +6270,10 @@
       </p:sp>
       <p:pic>
         <p:nvPicPr>
-          <p:cNvPr id="4" name="Imagen 3">
+          <p:cNvPr id="3" name="Imagen 2">
             <a:extLst>
               <a:ext uri="{FF2B5EF4-FFF2-40B4-BE49-F238E27FC236}">
-                <a16:creationId xmlns:a16="http://schemas.microsoft.com/office/drawing/2014/main" id="{0D5BBB63-1AD2-B0DA-36EC-FD2C9649A63B}"/>
+                <a16:creationId xmlns:a16="http://schemas.microsoft.com/office/drawing/2014/main" id="{AB78AA33-A9D5-A3F6-9481-95BD64E36AD4}"/>
               </a:ext>
             </a:extLst>
           </p:cNvPr>
@@ -6291,8 +6290,8 @@
         </p:blipFill>
         <p:spPr>
           <a:xfrm>
-            <a:off x="0" y="1392535"/>
-            <a:ext cx="9144000" cy="2358430"/>
+            <a:off x="0" y="1351021"/>
+            <a:ext cx="9144000" cy="2441458"/>
           </a:xfrm>
           <a:prstGeom prst="rect">
             <a:avLst/>
@@ -6313,110 +6312,6 @@
 </file>
 
 <file path=ppt/slides/slide12.xml><?xml version="1.0" encoding="utf-8"?>
-<p:sld xmlns:a="http://schemas.openxmlformats.org/drawingml/2006/main" xmlns:r="http://schemas.openxmlformats.org/officeDocument/2006/relationships" xmlns:p="http://schemas.openxmlformats.org/presentationml/2006/main">
-  <p:cSld>
-    <p:spTree>
-      <p:nvGrpSpPr>
-        <p:cNvPr id="1" name="">
-          <a:extLst>
-            <a:ext uri="{FF2B5EF4-FFF2-40B4-BE49-F238E27FC236}">
-              <a16:creationId xmlns:a16="http://schemas.microsoft.com/office/drawing/2014/main" id="{200C1A25-C9EE-F5E8-70B0-72848C49620B}"/>
-            </a:ext>
-          </a:extLst>
-        </p:cNvPr>
-        <p:cNvGrpSpPr/>
-        <p:nvPr/>
-      </p:nvGrpSpPr>
-      <p:grpSpPr>
-        <a:xfrm>
-          <a:off x="0" y="0"/>
-          <a:ext cx="0" cy="0"/>
-          <a:chOff x="0" y="0"/>
-          <a:chExt cx="0" cy="0"/>
-        </a:xfrm>
-      </p:grpSpPr>
-      <p:sp>
-        <p:nvSpPr>
-          <p:cNvPr id="8" name="CuadroTexto 7">
-            <a:extLst>
-              <a:ext uri="{FF2B5EF4-FFF2-40B4-BE49-F238E27FC236}">
-                <a16:creationId xmlns:a16="http://schemas.microsoft.com/office/drawing/2014/main" id="{BD034C7B-D28A-2217-7904-DE5230378964}"/>
-              </a:ext>
-            </a:extLst>
-          </p:cNvPr>
-          <p:cNvSpPr txBox="1"/>
-          <p:nvPr/>
-        </p:nvSpPr>
-        <p:spPr>
-          <a:xfrm>
-            <a:off x="1926166" y="0"/>
-            <a:ext cx="5291667" cy="307777"/>
-          </a:xfrm>
-          <a:prstGeom prst="rect">
-            <a:avLst/>
-          </a:prstGeom>
-          <a:noFill/>
-        </p:spPr>
-        <p:txBody>
-          <a:bodyPr wrap="square" rtlCol="0">
-            <a:spAutoFit/>
-          </a:bodyPr>
-          <a:lstStyle/>
-          <a:p>
-            <a:pPr algn="ctr"/>
-            <a:r>
-              <a:rPr lang="es-MX" b="1" dirty="0">
-                <a:latin typeface="Montserrat" pitchFamily="2" charset="0"/>
-              </a:rPr>
-              <a:t>Temas de gobierno por radiodifusora</a:t>
-            </a:r>
-          </a:p>
-        </p:txBody>
-      </p:sp>
-      <p:pic>
-        <p:nvPicPr>
-          <p:cNvPr id="3" name="Imagen 2">
-            <a:extLst>
-              <a:ext uri="{FF2B5EF4-FFF2-40B4-BE49-F238E27FC236}">
-                <a16:creationId xmlns:a16="http://schemas.microsoft.com/office/drawing/2014/main" id="{7F9FC4D5-ACC1-2E78-F350-8EA7173A6A51}"/>
-              </a:ext>
-            </a:extLst>
-          </p:cNvPr>
-          <p:cNvPicPr>
-            <a:picLocks noChangeAspect="1"/>
-          </p:cNvPicPr>
-          <p:nvPr/>
-        </p:nvPicPr>
-        <p:blipFill>
-          <a:blip r:embed="rId2"/>
-          <a:stretch>
-            <a:fillRect/>
-          </a:stretch>
-        </p:blipFill>
-        <p:spPr>
-          <a:xfrm>
-            <a:off x="0" y="775196"/>
-            <a:ext cx="9144000" cy="3593108"/>
-          </a:xfrm>
-          <a:prstGeom prst="rect">
-            <a:avLst/>
-          </a:prstGeom>
-        </p:spPr>
-      </p:pic>
-    </p:spTree>
-    <p:extLst>
-      <p:ext uri="{BB962C8B-B14F-4D97-AF65-F5344CB8AC3E}">
-        <p14:creationId xmlns:p14="http://schemas.microsoft.com/office/powerpoint/2010/main" val="3986551415"/>
-      </p:ext>
-    </p:extLst>
-  </p:cSld>
-  <p:clrMapOvr>
-    <a:masterClrMapping/>
-  </p:clrMapOvr>
-</p:sld>
-</file>
-
-<file path=ppt/slides/slide13.xml><?xml version="1.0" encoding="utf-8"?>
 <p:sld xmlns:a="http://schemas.openxmlformats.org/drawingml/2006/main" xmlns:r="http://schemas.openxmlformats.org/officeDocument/2006/relationships" xmlns:p="http://schemas.openxmlformats.org/presentationml/2006/main">
   <p:cSld>
     <p:spTree>
@@ -6478,10 +6373,10 @@
       </p:sp>
       <p:pic>
         <p:nvPicPr>
-          <p:cNvPr id="3" name="Imagen 2">
+          <p:cNvPr id="4" name="Imagen 3">
             <a:extLst>
               <a:ext uri="{FF2B5EF4-FFF2-40B4-BE49-F238E27FC236}">
-                <a16:creationId xmlns:a16="http://schemas.microsoft.com/office/drawing/2014/main" id="{E76C2AE5-6278-2571-E9B9-B47ECDDEEB37}"/>
+                <a16:creationId xmlns:a16="http://schemas.microsoft.com/office/drawing/2014/main" id="{B0CDF22D-EB58-BA71-1204-F3559B54EAAC}"/>
               </a:ext>
             </a:extLst>
           </p:cNvPr>
@@ -6498,8 +6393,8 @@
         </p:blipFill>
         <p:spPr>
           <a:xfrm>
-            <a:off x="980574" y="1238064"/>
-            <a:ext cx="7182852" cy="2667372"/>
+            <a:off x="0" y="1711360"/>
+            <a:ext cx="9144000" cy="1720780"/>
           </a:xfrm>
           <a:prstGeom prst="rect">
             <a:avLst/>
@@ -6519,7 +6414,7 @@
 </p:sld>
 </file>
 
-<file path=ppt/slides/slide14.xml><?xml version="1.0" encoding="utf-8"?>
+<file path=ppt/slides/slide13.xml><?xml version="1.0" encoding="utf-8"?>
 <p:sld xmlns:a="http://schemas.openxmlformats.org/drawingml/2006/main" xmlns:r="http://schemas.openxmlformats.org/officeDocument/2006/relationships" xmlns:p="http://schemas.openxmlformats.org/presentationml/2006/main">
   <p:cSld>
     <p:spTree>
@@ -7076,10 +6971,10 @@
       </p:sp>
       <p:pic>
         <p:nvPicPr>
-          <p:cNvPr id="7" name="Imagen 6">
+          <p:cNvPr id="6" name="Imagen 5">
             <a:extLst>
               <a:ext uri="{FF2B5EF4-FFF2-40B4-BE49-F238E27FC236}">
-                <a16:creationId xmlns:a16="http://schemas.microsoft.com/office/drawing/2014/main" id="{25EB97D1-0406-82D5-AB0C-F106718C1792}"/>
+                <a16:creationId xmlns:a16="http://schemas.microsoft.com/office/drawing/2014/main" id="{A328D88E-F7AC-2A68-A018-1591D68BD674}"/>
               </a:ext>
             </a:extLst>
           </p:cNvPr>
@@ -7096,8 +6991,8 @@
         </p:blipFill>
         <p:spPr>
           <a:xfrm>
-            <a:off x="0" y="368923"/>
-            <a:ext cx="9144000" cy="4405654"/>
+            <a:off x="0" y="370887"/>
+            <a:ext cx="9144000" cy="4401725"/>
           </a:xfrm>
           <a:prstGeom prst="rect">
             <a:avLst/>
@@ -7174,10 +7069,10 @@
       </p:sp>
       <p:pic>
         <p:nvPicPr>
-          <p:cNvPr id="3" name="Imagen 2">
+          <p:cNvPr id="7" name="Imagen 6">
             <a:extLst>
               <a:ext uri="{FF2B5EF4-FFF2-40B4-BE49-F238E27FC236}">
-                <a16:creationId xmlns:a16="http://schemas.microsoft.com/office/drawing/2014/main" id="{3AFF2CA9-EA1D-3831-0E70-14EEC4AA8D42}"/>
+                <a16:creationId xmlns:a16="http://schemas.microsoft.com/office/drawing/2014/main" id="{836F7FE1-B4D4-E759-64CB-136040C938F3}"/>
               </a:ext>
             </a:extLst>
           </p:cNvPr>
@@ -7194,8 +7089,8 @@
         </p:blipFill>
         <p:spPr>
           <a:xfrm>
-            <a:off x="0" y="954854"/>
-            <a:ext cx="9144000" cy="3233792"/>
+            <a:off x="0" y="930455"/>
+            <a:ext cx="9144000" cy="3282590"/>
           </a:xfrm>
           <a:prstGeom prst="rect">
             <a:avLst/>
@@ -7278,10 +7173,10 @@
       </p:sp>
       <p:pic>
         <p:nvPicPr>
-          <p:cNvPr id="3" name="Imagen 2">
+          <p:cNvPr id="7" name="Imagen 6">
             <a:extLst>
               <a:ext uri="{FF2B5EF4-FFF2-40B4-BE49-F238E27FC236}">
-                <a16:creationId xmlns:a16="http://schemas.microsoft.com/office/drawing/2014/main" id="{5663E225-0271-8539-B654-7826BA48625D}"/>
+                <a16:creationId xmlns:a16="http://schemas.microsoft.com/office/drawing/2014/main" id="{7DAC338D-1158-A2FA-EBC1-3FCEECD54609}"/>
               </a:ext>
             </a:extLst>
           </p:cNvPr>
@@ -7298,8 +7193,8 @@
         </p:blipFill>
         <p:spPr>
           <a:xfrm>
-            <a:off x="0" y="352948"/>
-            <a:ext cx="9144000" cy="4437604"/>
+            <a:off x="0" y="443809"/>
+            <a:ext cx="9144000" cy="4255882"/>
           </a:xfrm>
           <a:prstGeom prst="rect">
             <a:avLst/>
@@ -7376,10 +7271,10 @@
       </p:sp>
       <p:pic>
         <p:nvPicPr>
-          <p:cNvPr id="4" name="Imagen 3">
+          <p:cNvPr id="7" name="Imagen 6">
             <a:extLst>
               <a:ext uri="{FF2B5EF4-FFF2-40B4-BE49-F238E27FC236}">
-                <a16:creationId xmlns:a16="http://schemas.microsoft.com/office/drawing/2014/main" id="{BA44FF99-E084-8536-CAC7-4677DBF1ED7E}"/>
+                <a16:creationId xmlns:a16="http://schemas.microsoft.com/office/drawing/2014/main" id="{BA8C45B0-4A21-6287-6AFE-B8111BCB1633}"/>
               </a:ext>
             </a:extLst>
           </p:cNvPr>
@@ -7396,8 +7291,8 @@
         </p:blipFill>
         <p:spPr>
           <a:xfrm>
-            <a:off x="0" y="1087698"/>
-            <a:ext cx="9144000" cy="2968103"/>
+            <a:off x="0" y="843433"/>
+            <a:ext cx="9144000" cy="3456633"/>
           </a:xfrm>
           <a:prstGeom prst="rect">
             <a:avLst/>

--- a/Reporte060426.pptx
+++ b/Reporte060426.pptx
@@ -5,7 +5,7 @@
     <p:sldMasterId id="2147483672" r:id="rId1"/>
   </p:sldMasterIdLst>
   <p:notesMasterIdLst>
-    <p:notesMasterId r:id="rId15"/>
+    <p:notesMasterId r:id="rId17"/>
   </p:notesMasterIdLst>
   <p:sldIdLst>
     <p:sldId id="350" r:id="rId2"/>
@@ -13,37 +13,39 @@
     <p:sldId id="352" r:id="rId4"/>
     <p:sldId id="378" r:id="rId5"/>
     <p:sldId id="381" r:id="rId6"/>
-    <p:sldId id="281" r:id="rId7"/>
-    <p:sldId id="351" r:id="rId8"/>
-    <p:sldId id="369" r:id="rId9"/>
-    <p:sldId id="361" r:id="rId10"/>
-    <p:sldId id="371" r:id="rId11"/>
-    <p:sldId id="370" r:id="rId12"/>
-    <p:sldId id="380" r:id="rId13"/>
-    <p:sldId id="280" r:id="rId14"/>
+    <p:sldId id="383" r:id="rId7"/>
+    <p:sldId id="382" r:id="rId8"/>
+    <p:sldId id="281" r:id="rId9"/>
+    <p:sldId id="351" r:id="rId10"/>
+    <p:sldId id="369" r:id="rId11"/>
+    <p:sldId id="361" r:id="rId12"/>
+    <p:sldId id="371" r:id="rId13"/>
+    <p:sldId id="370" r:id="rId14"/>
+    <p:sldId id="380" r:id="rId15"/>
+    <p:sldId id="280" r:id="rId16"/>
   </p:sldIdLst>
   <p:sldSz cx="9144000" cy="5143500" type="screen16x9"/>
   <p:notesSz cx="6858000" cy="9144000"/>
   <p:embeddedFontLst>
     <p:embeddedFont>
       <p:font typeface="Montserrat" panose="00000500000000000000" pitchFamily="2" charset="0"/>
-      <p:regular r:id="rId16"/>
-      <p:bold r:id="rId17"/>
-      <p:italic r:id="rId18"/>
-      <p:boldItalic r:id="rId19"/>
+      <p:regular r:id="rId18"/>
+      <p:bold r:id="rId19"/>
+      <p:italic r:id="rId20"/>
+      <p:boldItalic r:id="rId21"/>
     </p:embeddedFont>
     <p:embeddedFont>
       <p:font typeface="Montserrat Black" panose="00000A00000000000000" pitchFamily="2" charset="0"/>
-      <p:bold r:id="rId20"/>
-      <p:italic r:id="rId21"/>
-      <p:boldItalic r:id="rId22"/>
+      <p:bold r:id="rId22"/>
+      <p:italic r:id="rId23"/>
+      <p:boldItalic r:id="rId24"/>
     </p:embeddedFont>
     <p:embeddedFont>
       <p:font typeface="Segoe UI" panose="020B0502040204020203" pitchFamily="34" charset="0"/>
-      <p:regular r:id="rId23"/>
-      <p:bold r:id="rId24"/>
-      <p:italic r:id="rId25"/>
-      <p:boldItalic r:id="rId26"/>
+      <p:regular r:id="rId25"/>
+      <p:bold r:id="rId26"/>
+      <p:italic r:id="rId27"/>
+      <p:boldItalic r:id="rId28"/>
     </p:embeddedFont>
   </p:embeddedFontLst>
   <p:defaultTextStyle>
@@ -6060,7 +6062,7 @@
                   <a:srgbClr val="D8AB72"/>
                 </a:solidFill>
               </a:rPr>
-              <a:t>06 de abril</a:t>
+              <a:t>07 de abril</a:t>
             </a:r>
           </a:p>
           <a:p>
@@ -6116,6 +6118,208 @@
 </file>
 
 <file path=ppt/slides/slide10.xml><?xml version="1.0" encoding="utf-8"?>
+<p:sld xmlns:a="http://schemas.openxmlformats.org/drawingml/2006/main" xmlns:r="http://schemas.openxmlformats.org/officeDocument/2006/relationships" xmlns:p="http://schemas.openxmlformats.org/presentationml/2006/main">
+  <p:cSld>
+    <p:spTree>
+      <p:nvGrpSpPr>
+        <p:cNvPr id="1" name="">
+          <a:extLst>
+            <a:ext uri="{FF2B5EF4-FFF2-40B4-BE49-F238E27FC236}">
+              <a16:creationId xmlns:a16="http://schemas.microsoft.com/office/drawing/2014/main" id="{DB953E20-D2E3-C7B6-3681-7F75E49F37EF}"/>
+            </a:ext>
+          </a:extLst>
+        </p:cNvPr>
+        <p:cNvGrpSpPr/>
+        <p:nvPr/>
+      </p:nvGrpSpPr>
+      <p:grpSpPr>
+        <a:xfrm>
+          <a:off x="0" y="0"/>
+          <a:ext cx="0" cy="0"/>
+          <a:chOff x="0" y="0"/>
+          <a:chExt cx="0" cy="0"/>
+        </a:xfrm>
+      </p:grpSpPr>
+      <p:sp>
+        <p:nvSpPr>
+          <p:cNvPr id="5" name="CuadroTexto 4">
+            <a:extLst>
+              <a:ext uri="{FF2B5EF4-FFF2-40B4-BE49-F238E27FC236}">
+                <a16:creationId xmlns:a16="http://schemas.microsoft.com/office/drawing/2014/main" id="{2D220DED-6E95-D0AE-57E3-7DFB60F03ADD}"/>
+              </a:ext>
+            </a:extLst>
+          </p:cNvPr>
+          <p:cNvSpPr txBox="1"/>
+          <p:nvPr/>
+        </p:nvSpPr>
+        <p:spPr>
+          <a:xfrm>
+            <a:off x="1183340" y="0"/>
+            <a:ext cx="6763871" cy="369332"/>
+          </a:xfrm>
+          <a:prstGeom prst="rect">
+            <a:avLst/>
+          </a:prstGeom>
+          <a:noFill/>
+        </p:spPr>
+        <p:txBody>
+          <a:bodyPr wrap="square" rtlCol="0">
+            <a:spAutoFit/>
+          </a:bodyPr>
+          <a:lstStyle/>
+          <a:p>
+            <a:pPr algn="ctr"/>
+            <a:r>
+              <a:rPr lang="es-MX" sz="1800" b="1" dirty="0">
+                <a:latin typeface="Montserrat" panose="00000500000000000000" pitchFamily="2" charset="0"/>
+              </a:rPr>
+              <a:t>Información de gobierno en radiodifusoras</a:t>
+            </a:r>
+          </a:p>
+        </p:txBody>
+      </p:sp>
+      <p:pic>
+        <p:nvPicPr>
+          <p:cNvPr id="3" name="Imagen 2">
+            <a:extLst>
+              <a:ext uri="{FF2B5EF4-FFF2-40B4-BE49-F238E27FC236}">
+                <a16:creationId xmlns:a16="http://schemas.microsoft.com/office/drawing/2014/main" id="{BC47020F-AC25-DC46-523B-E42775EC0951}"/>
+              </a:ext>
+            </a:extLst>
+          </p:cNvPr>
+          <p:cNvPicPr>
+            <a:picLocks noChangeAspect="1"/>
+          </p:cNvPicPr>
+          <p:nvPr/>
+        </p:nvPicPr>
+        <p:blipFill>
+          <a:blip r:embed="rId2"/>
+          <a:stretch>
+            <a:fillRect/>
+          </a:stretch>
+        </p:blipFill>
+        <p:spPr>
+          <a:xfrm>
+            <a:off x="0" y="487033"/>
+            <a:ext cx="9144000" cy="4169434"/>
+          </a:xfrm>
+          <a:prstGeom prst="rect">
+            <a:avLst/>
+          </a:prstGeom>
+        </p:spPr>
+      </p:pic>
+    </p:spTree>
+    <p:extLst>
+      <p:ext uri="{BB962C8B-B14F-4D97-AF65-F5344CB8AC3E}">
+        <p14:creationId xmlns:p14="http://schemas.microsoft.com/office/powerpoint/2010/main" val="4224919290"/>
+      </p:ext>
+    </p:extLst>
+  </p:cSld>
+  <p:clrMapOvr>
+    <a:masterClrMapping/>
+  </p:clrMapOvr>
+</p:sld>
+</file>
+
+<file path=ppt/slides/slide11.xml><?xml version="1.0" encoding="utf-8"?>
+<p:sld xmlns:a="http://schemas.openxmlformats.org/drawingml/2006/main" xmlns:r="http://schemas.openxmlformats.org/officeDocument/2006/relationships" xmlns:p="http://schemas.openxmlformats.org/presentationml/2006/main">
+  <p:cSld>
+    <p:spTree>
+      <p:nvGrpSpPr>
+        <p:cNvPr id="1" name=""/>
+        <p:cNvGrpSpPr/>
+        <p:nvPr/>
+      </p:nvGrpSpPr>
+      <p:grpSpPr>
+        <a:xfrm>
+          <a:off x="0" y="0"/>
+          <a:ext cx="0" cy="0"/>
+          <a:chOff x="0" y="0"/>
+          <a:chExt cx="0" cy="0"/>
+        </a:xfrm>
+      </p:grpSpPr>
+      <p:sp>
+        <p:nvSpPr>
+          <p:cNvPr id="2" name="CuadroTexto 1">
+            <a:extLst>
+              <a:ext uri="{FF2B5EF4-FFF2-40B4-BE49-F238E27FC236}">
+                <a16:creationId xmlns:a16="http://schemas.microsoft.com/office/drawing/2014/main" id="{E270743E-55A0-8447-939B-33D92F1087F2}"/>
+              </a:ext>
+            </a:extLst>
+          </p:cNvPr>
+          <p:cNvSpPr txBox="1"/>
+          <p:nvPr/>
+        </p:nvSpPr>
+        <p:spPr>
+          <a:xfrm>
+            <a:off x="1183340" y="0"/>
+            <a:ext cx="6763871" cy="369332"/>
+          </a:xfrm>
+          <a:prstGeom prst="rect">
+            <a:avLst/>
+          </a:prstGeom>
+          <a:noFill/>
+        </p:spPr>
+        <p:txBody>
+          <a:bodyPr wrap="square" rtlCol="0">
+            <a:spAutoFit/>
+          </a:bodyPr>
+          <a:lstStyle/>
+          <a:p>
+            <a:pPr algn="ctr"/>
+            <a:r>
+              <a:rPr lang="es-MX" sz="1800" b="1" dirty="0">
+                <a:latin typeface="Montserrat" panose="00000500000000000000" pitchFamily="2" charset="0"/>
+              </a:rPr>
+              <a:t>Información de gobierno en radiodifusoras</a:t>
+            </a:r>
+          </a:p>
+        </p:txBody>
+      </p:sp>
+      <p:pic>
+        <p:nvPicPr>
+          <p:cNvPr id="4" name="Imagen 3">
+            <a:extLst>
+              <a:ext uri="{FF2B5EF4-FFF2-40B4-BE49-F238E27FC236}">
+                <a16:creationId xmlns:a16="http://schemas.microsoft.com/office/drawing/2014/main" id="{94DFE778-6058-F329-3429-F5BC10914CA9}"/>
+              </a:ext>
+            </a:extLst>
+          </p:cNvPr>
+          <p:cNvPicPr>
+            <a:picLocks noChangeAspect="1"/>
+          </p:cNvPicPr>
+          <p:nvPr/>
+        </p:nvPicPr>
+        <p:blipFill>
+          <a:blip r:embed="rId2"/>
+          <a:stretch>
+            <a:fillRect/>
+          </a:stretch>
+        </p:blipFill>
+        <p:spPr>
+          <a:xfrm>
+            <a:off x="0" y="1255993"/>
+            <a:ext cx="9144000" cy="2631514"/>
+          </a:xfrm>
+          <a:prstGeom prst="rect">
+            <a:avLst/>
+          </a:prstGeom>
+        </p:spPr>
+      </p:pic>
+    </p:spTree>
+    <p:extLst>
+      <p:ext uri="{BB962C8B-B14F-4D97-AF65-F5344CB8AC3E}">
+        <p14:creationId xmlns:p14="http://schemas.microsoft.com/office/powerpoint/2010/main" val="1977228479"/>
+      </p:ext>
+    </p:extLst>
+  </p:cSld>
+  <p:clrMapOvr>
+    <a:masterClrMapping/>
+  </p:clrMapOvr>
+</p:sld>
+</file>
+
+<file path=ppt/slides/slide12.xml><?xml version="1.0" encoding="utf-8"?>
 <p:sld xmlns:a="http://schemas.openxmlformats.org/drawingml/2006/main" xmlns:r="http://schemas.openxmlformats.org/officeDocument/2006/relationships" xmlns:p="http://schemas.openxmlformats.org/presentationml/2006/main">
   <p:cSld>
     <p:spTree>
@@ -6172,10 +6376,10 @@
       </p:sp>
       <p:pic>
         <p:nvPicPr>
-          <p:cNvPr id="4" name="Imagen 3">
+          <p:cNvPr id="3" name="Imagen 2">
             <a:extLst>
               <a:ext uri="{FF2B5EF4-FFF2-40B4-BE49-F238E27FC236}">
-                <a16:creationId xmlns:a16="http://schemas.microsoft.com/office/drawing/2014/main" id="{DEFC884C-751E-94CD-94DB-D571B68ECACC}"/>
+                <a16:creationId xmlns:a16="http://schemas.microsoft.com/office/drawing/2014/main" id="{4574ADE9-112E-3027-EBA8-15C432FD172B}"/>
               </a:ext>
             </a:extLst>
           </p:cNvPr>
@@ -6192,8 +6396,8 @@
         </p:blipFill>
         <p:spPr>
           <a:xfrm>
-            <a:off x="0" y="1364579"/>
-            <a:ext cx="9144000" cy="2414341"/>
+            <a:off x="0" y="1239951"/>
+            <a:ext cx="9144000" cy="2663598"/>
           </a:xfrm>
           <a:prstGeom prst="rect">
             <a:avLst/>
@@ -6213,7 +6417,7 @@
 </p:sld>
 </file>
 
-<file path=ppt/slides/slide11.xml><?xml version="1.0" encoding="utf-8"?>
+<file path=ppt/slides/slide13.xml><?xml version="1.0" encoding="utf-8"?>
 <p:sld xmlns:a="http://schemas.openxmlformats.org/drawingml/2006/main" xmlns:r="http://schemas.openxmlformats.org/officeDocument/2006/relationships" xmlns:p="http://schemas.openxmlformats.org/presentationml/2006/main">
   <p:cSld>
     <p:spTree>
@@ -6270,10 +6474,10 @@
       </p:sp>
       <p:pic>
         <p:nvPicPr>
-          <p:cNvPr id="3" name="Imagen 2">
+          <p:cNvPr id="4" name="Imagen 3">
             <a:extLst>
               <a:ext uri="{FF2B5EF4-FFF2-40B4-BE49-F238E27FC236}">
-                <a16:creationId xmlns:a16="http://schemas.microsoft.com/office/drawing/2014/main" id="{AB78AA33-A9D5-A3F6-9481-95BD64E36AD4}"/>
+                <a16:creationId xmlns:a16="http://schemas.microsoft.com/office/drawing/2014/main" id="{BD3D68E7-1CEF-0BA4-119D-D7DE6F6C8711}"/>
               </a:ext>
             </a:extLst>
           </p:cNvPr>
@@ -6290,8 +6494,8 @@
         </p:blipFill>
         <p:spPr>
           <a:xfrm>
-            <a:off x="0" y="1351021"/>
-            <a:ext cx="9144000" cy="2441458"/>
+            <a:off x="0" y="1424307"/>
+            <a:ext cx="9144000" cy="2294885"/>
           </a:xfrm>
           <a:prstGeom prst="rect">
             <a:avLst/>
@@ -6311,7 +6515,7 @@
 </p:sld>
 </file>
 
-<file path=ppt/slides/slide12.xml><?xml version="1.0" encoding="utf-8"?>
+<file path=ppt/slides/slide14.xml><?xml version="1.0" encoding="utf-8"?>
 <p:sld xmlns:a="http://schemas.openxmlformats.org/drawingml/2006/main" xmlns:r="http://schemas.openxmlformats.org/officeDocument/2006/relationships" xmlns:p="http://schemas.openxmlformats.org/presentationml/2006/main">
   <p:cSld>
     <p:spTree>
@@ -6373,10 +6577,10 @@
       </p:sp>
       <p:pic>
         <p:nvPicPr>
-          <p:cNvPr id="4" name="Imagen 3">
+          <p:cNvPr id="3" name="Imagen 2">
             <a:extLst>
               <a:ext uri="{FF2B5EF4-FFF2-40B4-BE49-F238E27FC236}">
-                <a16:creationId xmlns:a16="http://schemas.microsoft.com/office/drawing/2014/main" id="{B0CDF22D-EB58-BA71-1204-F3559B54EAAC}"/>
+                <a16:creationId xmlns:a16="http://schemas.microsoft.com/office/drawing/2014/main" id="{CFAA9414-AB5D-6703-04CA-60C85B4669C9}"/>
               </a:ext>
             </a:extLst>
           </p:cNvPr>
@@ -6393,8 +6597,8 @@
         </p:blipFill>
         <p:spPr>
           <a:xfrm>
-            <a:off x="0" y="1711360"/>
-            <a:ext cx="9144000" cy="1720780"/>
+            <a:off x="632294" y="400444"/>
+            <a:ext cx="7806388" cy="4485488"/>
           </a:xfrm>
           <a:prstGeom prst="rect">
             <a:avLst/>
@@ -6414,7 +6618,7 @@
 </p:sld>
 </file>
 
-<file path=ppt/slides/slide13.xml><?xml version="1.0" encoding="utf-8"?>
+<file path=ppt/slides/slide15.xml><?xml version="1.0" encoding="utf-8"?>
 <p:sld xmlns:a="http://schemas.openxmlformats.org/drawingml/2006/main" xmlns:r="http://schemas.openxmlformats.org/officeDocument/2006/relationships" xmlns:p="http://schemas.openxmlformats.org/presentationml/2006/main">
   <p:cSld>
     <p:spTree>
@@ -6533,10 +6737,10 @@
       </p:sp>
       <p:pic>
         <p:nvPicPr>
-          <p:cNvPr id="3" name="Imagen 2">
+          <p:cNvPr id="4" name="Imagen 3">
             <a:extLst>
               <a:ext uri="{FF2B5EF4-FFF2-40B4-BE49-F238E27FC236}">
-                <a16:creationId xmlns:a16="http://schemas.microsoft.com/office/drawing/2014/main" id="{352D2DCF-D3AB-B270-762F-FA5D40D3FF52}"/>
+                <a16:creationId xmlns:a16="http://schemas.microsoft.com/office/drawing/2014/main" id="{DDAAD01E-7DB8-5F98-CA0B-DEA61FCB2ECB}"/>
               </a:ext>
             </a:extLst>
           </p:cNvPr>
@@ -6554,7 +6758,7 @@
         <p:spPr>
           <a:xfrm>
             <a:off x="0" y="523220"/>
-            <a:ext cx="9144000" cy="4257029"/>
+            <a:ext cx="9144000" cy="4291177"/>
           </a:xfrm>
           <a:prstGeom prst="rect">
             <a:avLst/>
@@ -6641,10 +6845,10 @@
       </p:sp>
       <p:pic>
         <p:nvPicPr>
-          <p:cNvPr id="3" name="Imagen 2">
+          <p:cNvPr id="4" name="Imagen 3">
             <a:extLst>
               <a:ext uri="{FF2B5EF4-FFF2-40B4-BE49-F238E27FC236}">
-                <a16:creationId xmlns:a16="http://schemas.microsoft.com/office/drawing/2014/main" id="{E2A85922-C470-B781-190F-3B32F0266D36}"/>
+                <a16:creationId xmlns:a16="http://schemas.microsoft.com/office/drawing/2014/main" id="{2A0FA052-F7EB-A891-4403-657DD8CBA4B7}"/>
               </a:ext>
             </a:extLst>
           </p:cNvPr>
@@ -6661,8 +6865,8 @@
         </p:blipFill>
         <p:spPr>
           <a:xfrm>
-            <a:off x="0" y="1050232"/>
-            <a:ext cx="9144000" cy="3043036"/>
+            <a:off x="0" y="1012038"/>
+            <a:ext cx="9144000" cy="3119424"/>
           </a:xfrm>
           <a:prstGeom prst="rect">
             <a:avLst/>
@@ -6745,10 +6949,10 @@
       </p:sp>
       <p:pic>
         <p:nvPicPr>
-          <p:cNvPr id="4" name="Imagen 3">
+          <p:cNvPr id="3" name="Imagen 2">
             <a:extLst>
               <a:ext uri="{FF2B5EF4-FFF2-40B4-BE49-F238E27FC236}">
-                <a16:creationId xmlns:a16="http://schemas.microsoft.com/office/drawing/2014/main" id="{D408CF24-456A-D994-CCAC-E8B5F2DB70CD}"/>
+                <a16:creationId xmlns:a16="http://schemas.microsoft.com/office/drawing/2014/main" id="{7BA24B91-F066-ED9A-AF92-03D1623F8FFA}"/>
               </a:ext>
             </a:extLst>
           </p:cNvPr>
@@ -6765,8 +6969,38 @@
         </p:blipFill>
         <p:spPr>
           <a:xfrm>
-            <a:off x="601113" y="485125"/>
-            <a:ext cx="7868748" cy="4658375"/>
+            <a:off x="493505" y="521758"/>
+            <a:ext cx="8083963" cy="2343533"/>
+          </a:xfrm>
+          <a:prstGeom prst="rect">
+            <a:avLst/>
+          </a:prstGeom>
+        </p:spPr>
+      </p:pic>
+      <p:pic>
+        <p:nvPicPr>
+          <p:cNvPr id="9" name="Imagen 8">
+            <a:extLst>
+              <a:ext uri="{FF2B5EF4-FFF2-40B4-BE49-F238E27FC236}">
+                <a16:creationId xmlns:a16="http://schemas.microsoft.com/office/drawing/2014/main" id="{E08CC722-188E-4E30-E6C2-B74B360BC27C}"/>
+              </a:ext>
+            </a:extLst>
+          </p:cNvPr>
+          <p:cNvPicPr>
+            <a:picLocks noChangeAspect="1"/>
+          </p:cNvPicPr>
+          <p:nvPr/>
+        </p:nvPicPr>
+        <p:blipFill>
+          <a:blip r:embed="rId3"/>
+          <a:stretch>
+            <a:fillRect/>
+          </a:stretch>
+        </p:blipFill>
+        <p:spPr>
+          <a:xfrm>
+            <a:off x="-7684" y="2891619"/>
+            <a:ext cx="9144000" cy="2251881"/>
           </a:xfrm>
           <a:prstGeom prst="rect">
             <a:avLst/>
@@ -6849,12 +7083,72 @@
           </a:p>
         </p:txBody>
       </p:sp>
+      <p:pic>
+        <p:nvPicPr>
+          <p:cNvPr id="5" name="Imagen 4">
+            <a:extLst>
+              <a:ext uri="{FF2B5EF4-FFF2-40B4-BE49-F238E27FC236}">
+                <a16:creationId xmlns:a16="http://schemas.microsoft.com/office/drawing/2014/main" id="{454CD13B-1971-7581-FA67-EA9A2BA72300}"/>
+              </a:ext>
+            </a:extLst>
+          </p:cNvPr>
+          <p:cNvPicPr>
+            <a:picLocks noChangeAspect="1"/>
+          </p:cNvPicPr>
+          <p:nvPr/>
+        </p:nvPicPr>
+        <p:blipFill>
+          <a:blip r:embed="rId2"/>
+          <a:stretch>
+            <a:fillRect/>
+          </a:stretch>
+        </p:blipFill>
+        <p:spPr>
+          <a:xfrm>
+            <a:off x="0" y="511564"/>
+            <a:ext cx="9144000" cy="4263248"/>
+          </a:xfrm>
+          <a:prstGeom prst="rect">
+            <a:avLst/>
+          </a:prstGeom>
+        </p:spPr>
+      </p:pic>
+    </p:spTree>
+    <p:extLst>
+      <p:ext uri="{BB962C8B-B14F-4D97-AF65-F5344CB8AC3E}">
+        <p14:creationId xmlns:p14="http://schemas.microsoft.com/office/powerpoint/2010/main" val="3702185673"/>
+      </p:ext>
+    </p:extLst>
+  </p:cSld>
+  <p:clrMapOvr>
+    <a:masterClrMapping/>
+  </p:clrMapOvr>
+</p:sld>
+</file>
+
+<file path=ppt/slides/slide6.xml><?xml version="1.0" encoding="utf-8"?>
+<p:sld xmlns:a="http://schemas.openxmlformats.org/drawingml/2006/main" xmlns:r="http://schemas.openxmlformats.org/officeDocument/2006/relationships" xmlns:p="http://schemas.openxmlformats.org/presentationml/2006/main">
+  <p:cSld>
+    <p:spTree>
+      <p:nvGrpSpPr>
+        <p:cNvPr id="1" name=""/>
+        <p:cNvGrpSpPr/>
+        <p:nvPr/>
+      </p:nvGrpSpPr>
+      <p:grpSpPr>
+        <a:xfrm>
+          <a:off x="0" y="0"/>
+          <a:ext cx="0" cy="0"/>
+          <a:chOff x="0" y="0"/>
+          <a:chExt cx="0" cy="0"/>
+        </a:xfrm>
+      </p:grpSpPr>
       <p:sp>
         <p:nvSpPr>
-          <p:cNvPr id="2" name="CuadroTexto 1">
+          <p:cNvPr id="4" name="CuadroTexto 3">
             <a:extLst>
               <a:ext uri="{FF2B5EF4-FFF2-40B4-BE49-F238E27FC236}">
-                <a16:creationId xmlns:a16="http://schemas.microsoft.com/office/drawing/2014/main" id="{E2C8D1FE-46AF-FB4E-F64E-1AA2B019C6BC}"/>
+                <a16:creationId xmlns:a16="http://schemas.microsoft.com/office/drawing/2014/main" id="{93E90D07-3C7A-2759-F2C8-F2BA3705CBD8}"/>
               </a:ext>
             </a:extLst>
           </p:cNvPr>
@@ -6863,8 +7157,8 @@
         </p:nvSpPr>
         <p:spPr>
           <a:xfrm>
-            <a:off x="338098" y="2227689"/>
-            <a:ext cx="8244968" cy="830997"/>
+            <a:off x="1828800" y="0"/>
+            <a:ext cx="5486400" cy="523220"/>
           </a:xfrm>
           <a:prstGeom prst="rect">
             <a:avLst/>
@@ -6879,18 +7173,112 @@
           <a:p>
             <a:pPr algn="ctr"/>
             <a:r>
-              <a:rPr lang="es-MX" sz="2400" b="1" dirty="0">
-                <a:latin typeface="Montserrat" panose="00000500000000000000" pitchFamily="2" charset="0"/>
+              <a:rPr lang="es-MX" sz="2800" b="1" dirty="0">
+                <a:latin typeface="Montserrat" pitchFamily="2" charset="0"/>
               </a:rPr>
-              <a:t>No se registró información del gobernador en primeras planas</a:t>
+              <a:t>Gobierno del estado</a:t>
             </a:r>
           </a:p>
         </p:txBody>
       </p:sp>
+      <p:pic>
+        <p:nvPicPr>
+          <p:cNvPr id="1026" name="Picture 2">
+            <a:extLst>
+              <a:ext uri="{FF2B5EF4-FFF2-40B4-BE49-F238E27FC236}">
+                <a16:creationId xmlns:a16="http://schemas.microsoft.com/office/drawing/2014/main" id="{70C5022E-7339-9815-437A-7088F6F447AF}"/>
+              </a:ext>
+            </a:extLst>
+          </p:cNvPr>
+          <p:cNvPicPr>
+            <a:picLocks noChangeAspect="1" noChangeArrowheads="1"/>
+          </p:cNvPicPr>
+          <p:nvPr/>
+        </p:nvPicPr>
+        <p:blipFill>
+          <a:blip r:embed="rId2">
+            <a:extLst>
+              <a:ext uri="{28A0092B-C50C-407E-A947-70E740481C1C}">
+                <a14:useLocalDpi xmlns:a14="http://schemas.microsoft.com/office/drawing/2010/main" val="0"/>
+              </a:ext>
+            </a:extLst>
+          </a:blip>
+          <a:srcRect/>
+          <a:stretch>
+            <a:fillRect/>
+          </a:stretch>
+        </p:blipFill>
+        <p:spPr bwMode="auto">
+          <a:xfrm>
+            <a:off x="0" y="783771"/>
+            <a:ext cx="4535488" cy="3573075"/>
+          </a:xfrm>
+          <a:prstGeom prst="rect">
+            <a:avLst/>
+          </a:prstGeom>
+          <a:noFill/>
+          <a:extLst>
+            <a:ext uri="{909E8E84-426E-40DD-AFC4-6F175D3DCCD1}">
+              <a14:hiddenFill xmlns:a14="http://schemas.microsoft.com/office/drawing/2010/main">
+                <a:solidFill>
+                  <a:srgbClr val="FFFFFF"/>
+                </a:solidFill>
+              </a14:hiddenFill>
+            </a:ext>
+          </a:extLst>
+        </p:spPr>
+      </p:pic>
+      <p:pic>
+        <p:nvPicPr>
+          <p:cNvPr id="1028" name="Picture 4">
+            <a:extLst>
+              <a:ext uri="{FF2B5EF4-FFF2-40B4-BE49-F238E27FC236}">
+                <a16:creationId xmlns:a16="http://schemas.microsoft.com/office/drawing/2014/main" id="{AE32300D-4F7F-954A-C0A6-4ADBB941D081}"/>
+              </a:ext>
+            </a:extLst>
+          </p:cNvPr>
+          <p:cNvPicPr>
+            <a:picLocks noChangeAspect="1" noChangeArrowheads="1"/>
+          </p:cNvPicPr>
+          <p:nvPr/>
+        </p:nvPicPr>
+        <p:blipFill>
+          <a:blip r:embed="rId3">
+            <a:extLst>
+              <a:ext uri="{28A0092B-C50C-407E-A947-70E740481C1C}">
+                <a14:useLocalDpi xmlns:a14="http://schemas.microsoft.com/office/drawing/2010/main" val="0"/>
+              </a:ext>
+            </a:extLst>
+          </a:blip>
+          <a:srcRect/>
+          <a:stretch>
+            <a:fillRect/>
+          </a:stretch>
+        </p:blipFill>
+        <p:spPr bwMode="auto">
+          <a:xfrm>
+            <a:off x="4571999" y="783771"/>
+            <a:ext cx="4535487" cy="3642232"/>
+          </a:xfrm>
+          <a:prstGeom prst="rect">
+            <a:avLst/>
+          </a:prstGeom>
+          <a:noFill/>
+          <a:extLst>
+            <a:ext uri="{909E8E84-426E-40DD-AFC4-6F175D3DCCD1}">
+              <a14:hiddenFill xmlns:a14="http://schemas.microsoft.com/office/drawing/2010/main">
+                <a:solidFill>
+                  <a:srgbClr val="FFFFFF"/>
+                </a:solidFill>
+              </a14:hiddenFill>
+            </a:ext>
+          </a:extLst>
+        </p:spPr>
+      </p:pic>
     </p:spTree>
     <p:extLst>
       <p:ext uri="{BB962C8B-B14F-4D97-AF65-F5344CB8AC3E}">
-        <p14:creationId xmlns:p14="http://schemas.microsoft.com/office/powerpoint/2010/main" val="3702185673"/>
+        <p14:creationId xmlns:p14="http://schemas.microsoft.com/office/powerpoint/2010/main" val="706165336"/>
       </p:ext>
     </p:extLst>
   </p:cSld>
@@ -6900,7 +7288,111 @@
 </p:sld>
 </file>
 
-<file path=ppt/slides/slide6.xml><?xml version="1.0" encoding="utf-8"?>
+<file path=ppt/slides/slide7.xml><?xml version="1.0" encoding="utf-8"?>
+<p:sld xmlns:a="http://schemas.openxmlformats.org/drawingml/2006/main" xmlns:r="http://schemas.openxmlformats.org/officeDocument/2006/relationships" xmlns:p="http://schemas.openxmlformats.org/presentationml/2006/main">
+  <p:cSld>
+    <p:spTree>
+      <p:nvGrpSpPr>
+        <p:cNvPr id="1" name=""/>
+        <p:cNvGrpSpPr/>
+        <p:nvPr/>
+      </p:nvGrpSpPr>
+      <p:grpSpPr>
+        <a:xfrm>
+          <a:off x="0" y="0"/>
+          <a:ext cx="0" cy="0"/>
+          <a:chOff x="0" y="0"/>
+          <a:chExt cx="0" cy="0"/>
+        </a:xfrm>
+      </p:grpSpPr>
+      <p:sp>
+        <p:nvSpPr>
+          <p:cNvPr id="4" name="CuadroTexto 3">
+            <a:extLst>
+              <a:ext uri="{FF2B5EF4-FFF2-40B4-BE49-F238E27FC236}">
+                <a16:creationId xmlns:a16="http://schemas.microsoft.com/office/drawing/2014/main" id="{50DDD7D1-6134-6DD8-BA7B-8FA9C54732C2}"/>
+              </a:ext>
+            </a:extLst>
+          </p:cNvPr>
+          <p:cNvSpPr txBox="1"/>
+          <p:nvPr/>
+        </p:nvSpPr>
+        <p:spPr>
+          <a:xfrm>
+            <a:off x="908175" y="152426"/>
+            <a:ext cx="7254625" cy="369332"/>
+          </a:xfrm>
+          <a:prstGeom prst="rect">
+            <a:avLst/>
+          </a:prstGeom>
+          <a:noFill/>
+        </p:spPr>
+        <p:txBody>
+          <a:bodyPr wrap="square">
+            <a:spAutoFit/>
+          </a:bodyPr>
+          <a:lstStyle/>
+          <a:p>
+            <a:pPr algn="ctr">
+              <a:buNone/>
+            </a:pPr>
+            <a:r>
+              <a:rPr lang="es-MX" sz="1800" b="1" i="0" dirty="0">
+                <a:solidFill>
+                  <a:srgbClr val="000000"/>
+                </a:solidFill>
+                <a:effectLst/>
+                <a:latin typeface="Montserrat" pitchFamily="2" charset="0"/>
+              </a:rPr>
+              <a:t>Detalle de Notas negativas y positivas en primeras planas</a:t>
+            </a:r>
+          </a:p>
+        </p:txBody>
+      </p:sp>
+      <p:pic>
+        <p:nvPicPr>
+          <p:cNvPr id="6" name="Imagen 5">
+            <a:extLst>
+              <a:ext uri="{FF2B5EF4-FFF2-40B4-BE49-F238E27FC236}">
+                <a16:creationId xmlns:a16="http://schemas.microsoft.com/office/drawing/2014/main" id="{73B11C17-79CE-75AF-49BD-116CA0F8153E}"/>
+              </a:ext>
+            </a:extLst>
+          </p:cNvPr>
+          <p:cNvPicPr>
+            <a:picLocks noChangeAspect="1"/>
+          </p:cNvPicPr>
+          <p:nvPr/>
+        </p:nvPicPr>
+        <p:blipFill>
+          <a:blip r:embed="rId2"/>
+          <a:stretch>
+            <a:fillRect/>
+          </a:stretch>
+        </p:blipFill>
+        <p:spPr>
+          <a:xfrm>
+            <a:off x="410586" y="804616"/>
+            <a:ext cx="8249801" cy="3534268"/>
+          </a:xfrm>
+          <a:prstGeom prst="rect">
+            <a:avLst/>
+          </a:prstGeom>
+        </p:spPr>
+      </p:pic>
+    </p:spTree>
+    <p:extLst>
+      <p:ext uri="{BB962C8B-B14F-4D97-AF65-F5344CB8AC3E}">
+        <p14:creationId xmlns:p14="http://schemas.microsoft.com/office/powerpoint/2010/main" val="3666300645"/>
+      </p:ext>
+    </p:extLst>
+  </p:cSld>
+  <p:clrMapOvr>
+    <a:masterClrMapping/>
+  </p:clrMapOvr>
+</p:sld>
+</file>
+
+<file path=ppt/slides/slide8.xml><?xml version="1.0" encoding="utf-8"?>
 <p:sld xmlns:a="http://schemas.openxmlformats.org/drawingml/2006/main" xmlns:r="http://schemas.openxmlformats.org/officeDocument/2006/relationships" xmlns:p="http://schemas.openxmlformats.org/presentationml/2006/main">
   <p:cSld>
     <p:bg>
@@ -6971,10 +7463,10 @@
       </p:sp>
       <p:pic>
         <p:nvPicPr>
-          <p:cNvPr id="6" name="Imagen 5">
+          <p:cNvPr id="7" name="Imagen 6">
             <a:extLst>
               <a:ext uri="{FF2B5EF4-FFF2-40B4-BE49-F238E27FC236}">
-                <a16:creationId xmlns:a16="http://schemas.microsoft.com/office/drawing/2014/main" id="{A328D88E-F7AC-2A68-A018-1591D68BD674}"/>
+                <a16:creationId xmlns:a16="http://schemas.microsoft.com/office/drawing/2014/main" id="{2E519184-483E-6E47-29BB-5E4B5D56012F}"/>
               </a:ext>
             </a:extLst>
           </p:cNvPr>
@@ -6991,8 +7483,8 @@
         </p:blipFill>
         <p:spPr>
           <a:xfrm>
-            <a:off x="0" y="370887"/>
-            <a:ext cx="9144000" cy="4401725"/>
+            <a:off x="0" y="344235"/>
+            <a:ext cx="9144000" cy="4455030"/>
           </a:xfrm>
           <a:prstGeom prst="rect">
             <a:avLst/>
@@ -7012,7 +7504,7 @@
 </p:sld>
 </file>
 
-<file path=ppt/slides/slide7.xml><?xml version="1.0" encoding="utf-8"?>
+<file path=ppt/slides/slide9.xml><?xml version="1.0" encoding="utf-8"?>
 <p:sld xmlns:a="http://schemas.openxmlformats.org/drawingml/2006/main" xmlns:r="http://schemas.openxmlformats.org/officeDocument/2006/relationships" xmlns:p="http://schemas.openxmlformats.org/presentationml/2006/main">
   <p:cSld>
     <p:spTree>
@@ -7069,10 +7561,10 @@
       </p:sp>
       <p:pic>
         <p:nvPicPr>
-          <p:cNvPr id="7" name="Imagen 6">
+          <p:cNvPr id="3" name="Imagen 2">
             <a:extLst>
               <a:ext uri="{FF2B5EF4-FFF2-40B4-BE49-F238E27FC236}">
-                <a16:creationId xmlns:a16="http://schemas.microsoft.com/office/drawing/2014/main" id="{836F7FE1-B4D4-E759-64CB-136040C938F3}"/>
+                <a16:creationId xmlns:a16="http://schemas.microsoft.com/office/drawing/2014/main" id="{563C9A31-D66D-0587-E967-3D4615CEF415}"/>
               </a:ext>
             </a:extLst>
           </p:cNvPr>
@@ -7089,8 +7581,8 @@
         </p:blipFill>
         <p:spPr>
           <a:xfrm>
-            <a:off x="0" y="930455"/>
-            <a:ext cx="9144000" cy="3282590"/>
+            <a:off x="0" y="929115"/>
+            <a:ext cx="9144000" cy="3285269"/>
           </a:xfrm>
           <a:prstGeom prst="rect">
             <a:avLst/>
@@ -7101,208 +7593,6 @@
     <p:extLst>
       <p:ext uri="{BB962C8B-B14F-4D97-AF65-F5344CB8AC3E}">
         <p14:creationId xmlns:p14="http://schemas.microsoft.com/office/powerpoint/2010/main" val="2250269201"/>
-      </p:ext>
-    </p:extLst>
-  </p:cSld>
-  <p:clrMapOvr>
-    <a:masterClrMapping/>
-  </p:clrMapOvr>
-</p:sld>
-</file>
-
-<file path=ppt/slides/slide8.xml><?xml version="1.0" encoding="utf-8"?>
-<p:sld xmlns:a="http://schemas.openxmlformats.org/drawingml/2006/main" xmlns:r="http://schemas.openxmlformats.org/officeDocument/2006/relationships" xmlns:p="http://schemas.openxmlformats.org/presentationml/2006/main">
-  <p:cSld>
-    <p:spTree>
-      <p:nvGrpSpPr>
-        <p:cNvPr id="1" name="">
-          <a:extLst>
-            <a:ext uri="{FF2B5EF4-FFF2-40B4-BE49-F238E27FC236}">
-              <a16:creationId xmlns:a16="http://schemas.microsoft.com/office/drawing/2014/main" id="{DB953E20-D2E3-C7B6-3681-7F75E49F37EF}"/>
-            </a:ext>
-          </a:extLst>
-        </p:cNvPr>
-        <p:cNvGrpSpPr/>
-        <p:nvPr/>
-      </p:nvGrpSpPr>
-      <p:grpSpPr>
-        <a:xfrm>
-          <a:off x="0" y="0"/>
-          <a:ext cx="0" cy="0"/>
-          <a:chOff x="0" y="0"/>
-          <a:chExt cx="0" cy="0"/>
-        </a:xfrm>
-      </p:grpSpPr>
-      <p:sp>
-        <p:nvSpPr>
-          <p:cNvPr id="5" name="CuadroTexto 4">
-            <a:extLst>
-              <a:ext uri="{FF2B5EF4-FFF2-40B4-BE49-F238E27FC236}">
-                <a16:creationId xmlns:a16="http://schemas.microsoft.com/office/drawing/2014/main" id="{2D220DED-6E95-D0AE-57E3-7DFB60F03ADD}"/>
-              </a:ext>
-            </a:extLst>
-          </p:cNvPr>
-          <p:cNvSpPr txBox="1"/>
-          <p:nvPr/>
-        </p:nvSpPr>
-        <p:spPr>
-          <a:xfrm>
-            <a:off x="1183340" y="0"/>
-            <a:ext cx="6763871" cy="369332"/>
-          </a:xfrm>
-          <a:prstGeom prst="rect">
-            <a:avLst/>
-          </a:prstGeom>
-          <a:noFill/>
-        </p:spPr>
-        <p:txBody>
-          <a:bodyPr wrap="square" rtlCol="0">
-            <a:spAutoFit/>
-          </a:bodyPr>
-          <a:lstStyle/>
-          <a:p>
-            <a:pPr algn="ctr"/>
-            <a:r>
-              <a:rPr lang="es-MX" sz="1800" b="1" dirty="0">
-                <a:latin typeface="Montserrat" panose="00000500000000000000" pitchFamily="2" charset="0"/>
-              </a:rPr>
-              <a:t>Información de gobierno en radiodifusoras</a:t>
-            </a:r>
-          </a:p>
-        </p:txBody>
-      </p:sp>
-      <p:pic>
-        <p:nvPicPr>
-          <p:cNvPr id="7" name="Imagen 6">
-            <a:extLst>
-              <a:ext uri="{FF2B5EF4-FFF2-40B4-BE49-F238E27FC236}">
-                <a16:creationId xmlns:a16="http://schemas.microsoft.com/office/drawing/2014/main" id="{7DAC338D-1158-A2FA-EBC1-3FCEECD54609}"/>
-              </a:ext>
-            </a:extLst>
-          </p:cNvPr>
-          <p:cNvPicPr>
-            <a:picLocks noChangeAspect="1"/>
-          </p:cNvPicPr>
-          <p:nvPr/>
-        </p:nvPicPr>
-        <p:blipFill>
-          <a:blip r:embed="rId2"/>
-          <a:stretch>
-            <a:fillRect/>
-          </a:stretch>
-        </p:blipFill>
-        <p:spPr>
-          <a:xfrm>
-            <a:off x="0" y="443809"/>
-            <a:ext cx="9144000" cy="4255882"/>
-          </a:xfrm>
-          <a:prstGeom prst="rect">
-            <a:avLst/>
-          </a:prstGeom>
-        </p:spPr>
-      </p:pic>
-    </p:spTree>
-    <p:extLst>
-      <p:ext uri="{BB962C8B-B14F-4D97-AF65-F5344CB8AC3E}">
-        <p14:creationId xmlns:p14="http://schemas.microsoft.com/office/powerpoint/2010/main" val="4224919290"/>
-      </p:ext>
-    </p:extLst>
-  </p:cSld>
-  <p:clrMapOvr>
-    <a:masterClrMapping/>
-  </p:clrMapOvr>
-</p:sld>
-</file>
-
-<file path=ppt/slides/slide9.xml><?xml version="1.0" encoding="utf-8"?>
-<p:sld xmlns:a="http://schemas.openxmlformats.org/drawingml/2006/main" xmlns:r="http://schemas.openxmlformats.org/officeDocument/2006/relationships" xmlns:p="http://schemas.openxmlformats.org/presentationml/2006/main">
-  <p:cSld>
-    <p:spTree>
-      <p:nvGrpSpPr>
-        <p:cNvPr id="1" name=""/>
-        <p:cNvGrpSpPr/>
-        <p:nvPr/>
-      </p:nvGrpSpPr>
-      <p:grpSpPr>
-        <a:xfrm>
-          <a:off x="0" y="0"/>
-          <a:ext cx="0" cy="0"/>
-          <a:chOff x="0" y="0"/>
-          <a:chExt cx="0" cy="0"/>
-        </a:xfrm>
-      </p:grpSpPr>
-      <p:sp>
-        <p:nvSpPr>
-          <p:cNvPr id="2" name="CuadroTexto 1">
-            <a:extLst>
-              <a:ext uri="{FF2B5EF4-FFF2-40B4-BE49-F238E27FC236}">
-                <a16:creationId xmlns:a16="http://schemas.microsoft.com/office/drawing/2014/main" id="{E270743E-55A0-8447-939B-33D92F1087F2}"/>
-              </a:ext>
-            </a:extLst>
-          </p:cNvPr>
-          <p:cNvSpPr txBox="1"/>
-          <p:nvPr/>
-        </p:nvSpPr>
-        <p:spPr>
-          <a:xfrm>
-            <a:off x="1183340" y="0"/>
-            <a:ext cx="6763871" cy="369332"/>
-          </a:xfrm>
-          <a:prstGeom prst="rect">
-            <a:avLst/>
-          </a:prstGeom>
-          <a:noFill/>
-        </p:spPr>
-        <p:txBody>
-          <a:bodyPr wrap="square" rtlCol="0">
-            <a:spAutoFit/>
-          </a:bodyPr>
-          <a:lstStyle/>
-          <a:p>
-            <a:pPr algn="ctr"/>
-            <a:r>
-              <a:rPr lang="es-MX" sz="1800" b="1" dirty="0">
-                <a:latin typeface="Montserrat" panose="00000500000000000000" pitchFamily="2" charset="0"/>
-              </a:rPr>
-              <a:t>Información de gobierno en radiodifusoras</a:t>
-            </a:r>
-          </a:p>
-        </p:txBody>
-      </p:sp>
-      <p:pic>
-        <p:nvPicPr>
-          <p:cNvPr id="7" name="Imagen 6">
-            <a:extLst>
-              <a:ext uri="{FF2B5EF4-FFF2-40B4-BE49-F238E27FC236}">
-                <a16:creationId xmlns:a16="http://schemas.microsoft.com/office/drawing/2014/main" id="{BA8C45B0-4A21-6287-6AFE-B8111BCB1633}"/>
-              </a:ext>
-            </a:extLst>
-          </p:cNvPr>
-          <p:cNvPicPr>
-            <a:picLocks noChangeAspect="1"/>
-          </p:cNvPicPr>
-          <p:nvPr/>
-        </p:nvPicPr>
-        <p:blipFill>
-          <a:blip r:embed="rId2"/>
-          <a:stretch>
-            <a:fillRect/>
-          </a:stretch>
-        </p:blipFill>
-        <p:spPr>
-          <a:xfrm>
-            <a:off x="0" y="843433"/>
-            <a:ext cx="9144000" cy="3456633"/>
-          </a:xfrm>
-          <a:prstGeom prst="rect">
-            <a:avLst/>
-          </a:prstGeom>
-        </p:spPr>
-      </p:pic>
-    </p:spTree>
-    <p:extLst>
-      <p:ext uri="{BB962C8B-B14F-4D97-AF65-F5344CB8AC3E}">
-        <p14:creationId xmlns:p14="http://schemas.microsoft.com/office/powerpoint/2010/main" val="1977228479"/>
       </p:ext>
     </p:extLst>
   </p:cSld>
